--- a/evidence/2026-10-02/run-fair/raw/libreoffice/template-mutation/measured-3.pptx
+++ b/evidence/2026-10-02/run-fair/raw/libreoffice/template-mutation/measured-3.pptx
@@ -424,7 +424,7 @@
             <a:pPr indent="0" algn="r">
               <a:buNone/>
             </a:pPr>
-            <a:fld id="{098275F5-ACFD-4678-911E-689A7386E2F9}" type="slidenum">
+            <a:fld id="{400ABF4E-05DD-4929-8EC6-4AF9BF99E71F}" type="slidenum">
               <a:rPr lang="en-US" sz="1400" b="0" u="none" strike="noStrike">
                 <a:solidFill>
                   <a:srgbClr val="000000"/>
@@ -598,7 +598,7 @@
               </a:lnSpc>
               <a:buNone/>
             </a:pPr>
-            <a:fld id="{46B9FF16-1C3A-4A30-9A23-5B4AE2A26EC6}" type="slidenum">
+            <a:fld id="{4C4B3B92-A61C-431B-8D9A-333A5D000901}" type="slidenum">
               <a:rPr lang="en-US" sz="1200" b="0" u="none" strike="noStrike">
                 <a:solidFill>
                   <a:srgbClr val="000000"/>
@@ -915,7 +915,7 @@
               </a:lnSpc>
               <a:buNone/>
             </a:pPr>
-            <a:fld id="{A029EDF3-ECBA-49EE-A709-F1AFB524788F}" type="slidenum">
+            <a:fld id="{CD931726-4B72-4310-B7E5-37967AD70457}" type="slidenum">
               <a:rPr lang="en-US" sz="1200" b="0" u="none" strike="noStrike">
                 <a:solidFill>
                   <a:schemeClr val="dk1">
@@ -1627,7 +1627,7 @@
               </a:lnSpc>
               <a:buNone/>
             </a:pPr>
-            <a:fld id="{2362801B-4B8B-4DBC-B65C-08ED876B0029}" type="slidenum">
+            <a:fld id="{6605C19D-C1EA-4C17-84C4-ED3923A6E02D}" type="slidenum">
               <a:rPr lang="en-US" sz="1200" b="0" u="none" strike="noStrike">
                 <a:solidFill>
                   <a:schemeClr val="dk1">
@@ -2086,7 +2086,7 @@
               </a:lnSpc>
               <a:buNone/>
             </a:pPr>
-            <a:fld id="{B16997AC-05EB-4DB0-A215-CAC3FD4DB69F}" type="slidenum">
+            <a:fld id="{B8A3ECF8-A8D8-4934-88C1-69046BEC3BB7}" type="slidenum">
               <a:rPr lang="en-US" sz="1200" b="0" u="none" strike="noStrike">
                 <a:solidFill>
                   <a:schemeClr val="dk1">
@@ -2714,7 +2714,7 @@
               </a:lnSpc>
               <a:buNone/>
             </a:pPr>
-            <a:fld id="{D28F4F80-17B2-44B1-B805-B988C18D9061}" type="slidenum">
+            <a:fld id="{BFC7D28D-702C-4262-80A3-00D0D9E80064}" type="slidenum">
               <a:rPr lang="en-US" sz="1200" b="0" u="none" strike="noStrike">
                 <a:solidFill>
                   <a:schemeClr val="dk1">
@@ -3342,7 +3342,7 @@
               </a:lnSpc>
               <a:buNone/>
             </a:pPr>
-            <a:fld id="{5D1C1E03-1B86-4BBE-8253-CF6A31D48C92}" type="slidenum">
+            <a:fld id="{0DA47183-48A4-4FC8-A01B-4EB5528FFE24}" type="slidenum">
               <a:rPr lang="en-US" sz="1200" b="0" u="none" strike="noStrike">
                 <a:solidFill>
                   <a:schemeClr val="dk1">
@@ -3970,7 +3970,7 @@
               </a:lnSpc>
               <a:buNone/>
             </a:pPr>
-            <a:fld id="{2633FABB-4A5F-4D2B-A81D-105CEF499001}" type="slidenum">
+            <a:fld id="{A885384D-5A35-4A2E-902D-21EC7CC6B67D}" type="slidenum">
               <a:rPr lang="en-US" sz="1200" b="0" u="none" strike="noStrike">
                 <a:solidFill>
                   <a:schemeClr val="dk1">
@@ -4382,7 +4382,7 @@
               </a:lnSpc>
               <a:buNone/>
             </a:pPr>
-            <a:fld id="{AF947A48-7EC6-4673-B295-F130FCEF79F1}" type="slidenum">
+            <a:fld id="{03CE1575-3A75-443A-99A9-B9A9E7BD6CF0}" type="slidenum">
               <a:rPr lang="en-US" sz="1200" b="0" u="none" strike="noStrike">
                 <a:solidFill>
                   <a:schemeClr val="dk1">
@@ -5316,7 +5316,7 @@
               </a:lnSpc>
               <a:buNone/>
             </a:pPr>
-            <a:fld id="{7CA96E9A-EBC6-4761-AB9B-30FA9AE84FDA}" type="slidenum">
+            <a:fld id="{158802D4-9F70-47D7-AB70-9A4CA1DE3266}" type="slidenum">
               <a:rPr lang="en-US" sz="1200" b="0" u="none" strike="noStrike">
                 <a:solidFill>
                   <a:schemeClr val="dk1">
@@ -6478,7 +6478,7 @@
               </a:lnSpc>
               <a:buNone/>
             </a:pPr>
-            <a:fld id="{382F807C-5179-4EA5-B178-83EA58833E3F}" type="slidenum">
+            <a:fld id="{A942DDBE-4C71-4861-B941-08E93852175C}" type="slidenum">
               <a:rPr lang="en-US" sz="1200" b="0" u="none" strike="noStrike">
                 <a:solidFill>
                   <a:schemeClr val="dk1">
@@ -6800,7 +6800,7 @@
               </a:lnSpc>
               <a:buNone/>
             </a:pPr>
-            <a:fld id="{67F50EED-B0BE-437F-BAA2-F415B801B015}" type="slidenum">
+            <a:fld id="{A3EEC090-9CC5-409A-8D9B-4C7DB34B40D6}" type="slidenum">
               <a:rPr lang="en-US" sz="1200" b="0" u="none" strike="noStrike">
                 <a:solidFill>
                   <a:schemeClr val="dk1">
@@ -7050,7 +7050,7 @@
               </a:lnSpc>
               <a:buNone/>
             </a:pPr>
-            <a:fld id="{5517E703-2DFE-4130-B734-8E82D8CF2607}" type="slidenum">
+            <a:fld id="{F71C8BAB-ABFE-4D79-8814-6E6AB93AB9AC}" type="slidenum">
               <a:rPr lang="en-US" sz="1200" b="0" u="none" strike="noStrike">
                 <a:solidFill>
                   <a:schemeClr val="dk1">
